--- a/media/resources/files/Ekvivalenettuuluk_BOP_iREETTOO_KazynaIzdoo.pptx
+++ b/media/resources/files/Ekvivalenettuuluk_BOP_iREETTOO_KazynaIzdoo.pptx
@@ -27224,7 +27224,7 @@
                 <a:ea typeface="+mn-ea"/>
                 <a:cs typeface="+mn-cs"/>
               </a:rPr>
-              <a:t>Турдуу пикирлер учун ыраазычылык билдиребиз.</a:t>
+              <a:t>Түрдүү пикирлер үчүн ыраазычылык билдиребиз.</a:t>
             </a:r>
           </a:p>
           <a:p>

--- a/media/resources/files/Ekvivalenettuuluk_BOP_iREETTOO_KazynaIzdoo.pptx
+++ b/media/resources/files/Ekvivalenettuuluk_BOP_iREETTOO_KazynaIzdoo.pptx
@@ -3501,7 +3501,7 @@
             </a:pPr>
             <a:r>
               <a:rPr lang="ky-KG" sz="2400" b="1" dirty="0"/>
-              <a:t>Бөлчөктөрдү, ондуктарды жана пайыздарды иреттөө </a:t>
+              <a:t>Бөлчөктөрдү, ондуктарды жана пайыздарды ирээттөө </a:t>
             </a:r>
             <a:r>
               <a:rPr lang="en-US" sz="2400" dirty="0"/>
@@ -16472,7 +16472,7 @@
                                 <a:sysClr val="windowText" lastClr="000000"/>
                               </a:solidFill>
                             </a:rPr>
-                            <a:t>0.1</a:t>
+                            <a:t>0,1</a:t>
                           </a:r>
                         </a:p>
                       </a:txBody>
@@ -16862,7 +16862,7 @@
                                 <a:sysClr val="windowText" lastClr="000000"/>
                               </a:solidFill>
                             </a:rPr>
-                            <a:t>0.67</a:t>
+                            <a:t>0,67</a:t>
                           </a:r>
                         </a:p>
                       </a:txBody>
@@ -17141,7 +17141,7 @@
                                 <a:sysClr val="windowText" lastClr="000000"/>
                               </a:solidFill>
                             </a:rPr>
-                            <a:t>0.85</a:t>
+                            <a:t>0,85</a:t>
                           </a:r>
                         </a:p>
                       </a:txBody>
@@ -17259,7 +17259,7 @@
                                 <a:sysClr val="windowText" lastClr="000000"/>
                               </a:solidFill>
                             </a:rPr>
-                            <a:t>0.45</a:t>
+                            <a:t>0,45</a:t>
                           </a:r>
                         </a:p>
                       </a:txBody>
@@ -17976,7 +17976,7 @@
                                 <a:sysClr val="windowText" lastClr="000000"/>
                               </a:solidFill>
                             </a:rPr>
-                            <a:t>0.59</a:t>
+                            <a:t>0,59</a:t>
                           </a:r>
                         </a:p>
                       </a:txBody>
@@ -18259,7 +18259,7 @@
                                 <a:sysClr val="windowText" lastClr="000000"/>
                               </a:solidFill>
                             </a:rPr>
-                            <a:t>1.1</a:t>
+                            <a:t>1,1</a:t>
                           </a:r>
                         </a:p>
                       </a:txBody>
@@ -19313,7 +19313,7 @@
                                 <a:sysClr val="windowText" lastClr="000000"/>
                               </a:solidFill>
                             </a:rPr>
-                            <a:t>0.1</a:t>
+                            <a:t>0,1</a:t>
                           </a:r>
                         </a:p>
                       </a:txBody>
@@ -19658,7 +19658,7 @@
                                 <a:sysClr val="windowText" lastClr="000000"/>
                               </a:solidFill>
                             </a:rPr>
-                            <a:t>0.67</a:t>
+                            <a:t>0,67</a:t>
                           </a:r>
                         </a:p>
                       </a:txBody>
@@ -19892,7 +19892,7 @@
                                 <a:sysClr val="windowText" lastClr="000000"/>
                               </a:solidFill>
                             </a:rPr>
-                            <a:t>0.85</a:t>
+                            <a:t>0,85</a:t>
                           </a:r>
                         </a:p>
                       </a:txBody>
@@ -20010,7 +20010,7 @@
                                 <a:sysClr val="windowText" lastClr="000000"/>
                               </a:solidFill>
                             </a:rPr>
-                            <a:t>0.45</a:t>
+                            <a:t>0,45</a:t>
                           </a:r>
                         </a:p>
                       </a:txBody>
@@ -20592,7 +20592,7 @@
                                 <a:sysClr val="windowText" lastClr="000000"/>
                               </a:solidFill>
                             </a:rPr>
-                            <a:t>0.59</a:t>
+                            <a:t>0,59</a:t>
                           </a:r>
                         </a:p>
                       </a:txBody>
@@ -20830,7 +20830,7 @@
                                 <a:sysClr val="windowText" lastClr="000000"/>
                               </a:solidFill>
                             </a:rPr>
-                            <a:t>1.1</a:t>
+                            <a:t>1,1</a:t>
                           </a:r>
                         </a:p>
                       </a:txBody>
